--- a/markdown/files/slides/lecture26_p_np2.pptx
+++ b/markdown/files/slides/lecture26_p_np2.pptx
@@ -29784,7 +29784,7 @@
 </file>
 
 <file path=ppt/slides/slide26.xml><?xml version="1.0" encoding="utf-8"?>
-<p:sld xmlns:a="http://schemas.openxmlformats.org/drawingml/2006/main" xmlns:r="http://schemas.openxmlformats.org/officeDocument/2006/relationships" xmlns:p="http://schemas.openxmlformats.org/presentationml/2006/main" show="0">
+<p:sld xmlns:a="http://schemas.openxmlformats.org/drawingml/2006/main" xmlns:r="http://schemas.openxmlformats.org/officeDocument/2006/relationships" xmlns:p="http://schemas.openxmlformats.org/presentationml/2006/main">
   <p:cSld>
     <p:spTree>
       <p:nvGrpSpPr>
@@ -30058,7 +30058,7 @@
 </file>
 
 <file path=ppt/slides/slide27.xml><?xml version="1.0" encoding="utf-8"?>
-<p:sld xmlns:a="http://schemas.openxmlformats.org/drawingml/2006/main" xmlns:r="http://schemas.openxmlformats.org/officeDocument/2006/relationships" xmlns:p="http://schemas.openxmlformats.org/presentationml/2006/main" show="0">
+<p:sld xmlns:a="http://schemas.openxmlformats.org/drawingml/2006/main" xmlns:r="http://schemas.openxmlformats.org/officeDocument/2006/relationships" xmlns:p="http://schemas.openxmlformats.org/presentationml/2006/main">
   <p:cSld>
     <p:spTree>
       <p:nvGrpSpPr>
@@ -30302,7 +30302,7 @@
 </file>
 
 <file path=ppt/slides/slide28.xml><?xml version="1.0" encoding="utf-8"?>
-<p:sld xmlns:a="http://schemas.openxmlformats.org/drawingml/2006/main" xmlns:r="http://schemas.openxmlformats.org/officeDocument/2006/relationships" xmlns:p="http://schemas.openxmlformats.org/presentationml/2006/main" show="0">
+<p:sld xmlns:a="http://schemas.openxmlformats.org/drawingml/2006/main" xmlns:r="http://schemas.openxmlformats.org/officeDocument/2006/relationships" xmlns:p="http://schemas.openxmlformats.org/presentationml/2006/main">
   <p:cSld>
     <p:spTree>
       <p:nvGrpSpPr>
@@ -30445,7 +30445,7 @@
 </file>
 
 <file path=ppt/slides/slide29.xml><?xml version="1.0" encoding="utf-8"?>
-<p:sld xmlns:a="http://schemas.openxmlformats.org/drawingml/2006/main" xmlns:r="http://schemas.openxmlformats.org/officeDocument/2006/relationships" xmlns:p="http://schemas.openxmlformats.org/presentationml/2006/main" show="0">
+<p:sld xmlns:a="http://schemas.openxmlformats.org/drawingml/2006/main" xmlns:r="http://schemas.openxmlformats.org/officeDocument/2006/relationships" xmlns:p="http://schemas.openxmlformats.org/presentationml/2006/main">
   <p:cSld>
     <p:spTree>
       <p:nvGrpSpPr>
@@ -30728,7 +30728,7 @@
 </file>
 
 <file path=ppt/slides/slide30.xml><?xml version="1.0" encoding="utf-8"?>
-<p:sld xmlns:a="http://schemas.openxmlformats.org/drawingml/2006/main" xmlns:r="http://schemas.openxmlformats.org/officeDocument/2006/relationships" xmlns:p="http://schemas.openxmlformats.org/presentationml/2006/main" show="0">
+<p:sld xmlns:a="http://schemas.openxmlformats.org/drawingml/2006/main" xmlns:r="http://schemas.openxmlformats.org/officeDocument/2006/relationships" xmlns:p="http://schemas.openxmlformats.org/presentationml/2006/main">
   <p:cSld>
     <p:spTree>
       <p:nvGrpSpPr>

--- a/markdown/files/slides/lecture26_p_np2.pptx
+++ b/markdown/files/slides/lecture26_p_np2.pptx
@@ -3748,9 +3748,18 @@
               <a:rPr lang="en-US" dirty="0"/>
             </a:br>
             <a:r>
+              <a:rPr lang="en-US"/>
+              <a:t>Lecture 26: </a:t>
+            </a:r>
+            <a:r>
               <a:rPr lang="en-US" dirty="0"/>
-              <a:t>Lecture 25: P and NP</a:t>
+              <a:t>P </a:t>
             </a:r>
+            <a:r>
+              <a:rPr lang="en-US"/>
+              <a:t>and NP 2</a:t>
+            </a:r>
+            <a:endParaRPr lang="en-US" dirty="0"/>
           </a:p>
         </p:txBody>
       </p:sp>
